--- a/期中考/114學年下學期Dotnet程式設計_期中考考題.pptx
+++ b/期中考/114學年下學期Dotnet程式設計_期中考考題.pptx
@@ -3707,16 +3707,6 @@
           <a:lstStyle/>
           <a:p>
             <a:r>
-              <a:rPr lang="en-US" altLang="zh-TW" b="1" smtClean="0">
-                <a:solidFill>
-                  <a:srgbClr val="0000FF"/>
-                </a:solidFill>
-                <a:latin typeface="標楷體" panose="03000509000000000000" pitchFamily="65" charset="-120"/>
-                <a:ea typeface="標楷體" panose="03000509000000000000" pitchFamily="65" charset="-120"/>
-              </a:rPr>
-              <a:t>11.B ANS</a:t>
-            </a:r>
-            <a:r>
               <a:rPr lang="en-US" altLang="zh-TW" b="1" dirty="0" smtClean="0">
                 <a:solidFill>
                   <a:srgbClr val="0000FF"/>
@@ -3724,7 +3714,7 @@
                 <a:latin typeface="標楷體" panose="03000509000000000000" pitchFamily="65" charset="-120"/>
                 <a:ea typeface="標楷體" panose="03000509000000000000" pitchFamily="65" charset="-120"/>
               </a:rPr>
-              <a:t>:</a:t>
+              <a:t>11.B ANS:</a:t>
             </a:r>
           </a:p>
           <a:p>
@@ -4040,14 +4030,14 @@
               <a:t>單價改成</a:t>
             </a:r>
             <a:r>
-              <a:rPr lang="en-US" altLang="zh-TW" dirty="0" smtClean="0">
-                <a:solidFill>
-                  <a:srgbClr val="0000FF"/>
-                </a:solidFill>
-                <a:latin typeface="標楷體" panose="03000509000000000000" pitchFamily="65" charset="-120"/>
-                <a:ea typeface="標楷體" panose="03000509000000000000" pitchFamily="65" charset="-120"/>
-              </a:rPr>
-              <a:t>79 </a:t>
+              <a:rPr lang="en-US" altLang="zh-TW" smtClean="0">
+                <a:solidFill>
+                  <a:srgbClr val="0000FF"/>
+                </a:solidFill>
+                <a:latin typeface="標楷體" panose="03000509000000000000" pitchFamily="65" charset="-120"/>
+                <a:ea typeface="標楷體" panose="03000509000000000000" pitchFamily="65" charset="-120"/>
+              </a:rPr>
+              <a:t>790 </a:t>
             </a:r>
             <a:r>
               <a:rPr lang="en-US" altLang="zh-TW" dirty="0" smtClean="0">
@@ -5472,17 +5462,7 @@
                 <a:latin typeface="標楷體" panose="03000509000000000000" pitchFamily="65" charset="-120"/>
                 <a:ea typeface="標楷體" panose="03000509000000000000" pitchFamily="65" charset="-120"/>
               </a:rPr>
-              <a:t>欄位</a:t>
-            </a:r>
-            <a:r>
-              <a:rPr lang="zh-TW" altLang="en-US" dirty="0" smtClean="0">
-                <a:solidFill>
-                  <a:srgbClr val="0000FF"/>
-                </a:solidFill>
-                <a:latin typeface="標楷體" panose="03000509000000000000" pitchFamily="65" charset="-120"/>
-                <a:ea typeface="標楷體" panose="03000509000000000000" pitchFamily="65" charset="-120"/>
-              </a:rPr>
-              <a:t>，順序為（進貨日期</a:t>
+              <a:t>欄位，順序為（進貨日期</a:t>
             </a:r>
             <a:r>
               <a:rPr lang="zh-TW" altLang="en-US" dirty="0" smtClean="0">
@@ -5522,17 +5502,7 @@
                 <a:latin typeface="標楷體" panose="03000509000000000000" pitchFamily="65" charset="-120"/>
                 <a:ea typeface="標楷體" panose="03000509000000000000" pitchFamily="65" charset="-120"/>
               </a:rPr>
-              <a:t>升冪排列</a:t>
-            </a:r>
-            <a:r>
-              <a:rPr lang="zh-TW" altLang="en-US" dirty="0" smtClean="0">
-                <a:solidFill>
-                  <a:srgbClr val="0000FF"/>
-                </a:solidFill>
-                <a:latin typeface="標楷體" panose="03000509000000000000" pitchFamily="65" charset="-120"/>
-                <a:ea typeface="標楷體" panose="03000509000000000000" pitchFamily="65" charset="-120"/>
-              </a:rPr>
-              <a:t> </a:t>
+              <a:t>升冪排列 </a:t>
             </a:r>
             <a:r>
               <a:rPr lang="en-US" altLang="zh-TW" dirty="0">
@@ -6080,15 +6050,7 @@
                   <a:srgbClr val="0000FF"/>
                 </a:solidFill>
               </a:rPr>
-              <a:t>6</a:t>
-            </a:r>
-            <a:r>
-              <a:rPr lang="en-US" altLang="zh-TW" dirty="0" smtClean="0">
-                <a:solidFill>
-                  <a:srgbClr val="0000FF"/>
-                </a:solidFill>
-              </a:rPr>
-              <a:t>.</a:t>
+              <a:t>6.</a:t>
             </a:r>
             <a:r>
               <a:rPr lang="zh-TW" altLang="en-US" dirty="0">
@@ -6955,17 +6917,7 @@
                 <a:latin typeface="標楷體" panose="03000509000000000000" pitchFamily="65" charset="-120"/>
                 <a:ea typeface="標楷體" panose="03000509000000000000" pitchFamily="65" charset="-120"/>
               </a:rPr>
-              <a:t>8</a:t>
-            </a:r>
-            <a:r>
-              <a:rPr lang="en-US" altLang="zh-TW" dirty="0" smtClean="0">
-                <a:solidFill>
-                  <a:srgbClr val="0000FF"/>
-                </a:solidFill>
-                <a:latin typeface="標楷體" panose="03000509000000000000" pitchFamily="65" charset="-120"/>
-                <a:ea typeface="標楷體" panose="03000509000000000000" pitchFamily="65" charset="-120"/>
-              </a:rPr>
-              <a:t>.</a:t>
+              <a:t>8.</a:t>
             </a:r>
             <a:r>
               <a:rPr lang="zh-TW" altLang="en-US" dirty="0">
@@ -7221,15 +7173,7 @@
                   <a:srgbClr val="0000FF"/>
                 </a:solidFill>
               </a:rPr>
-              <a:t>9</a:t>
-            </a:r>
-            <a:r>
-              <a:rPr lang="en-US" altLang="zh-TW" dirty="0" smtClean="0">
-                <a:solidFill>
-                  <a:srgbClr val="0000FF"/>
-                </a:solidFill>
-              </a:rPr>
-              <a:t>.</a:t>
+              <a:t>9.</a:t>
             </a:r>
             <a:r>
               <a:rPr lang="zh-TW" altLang="en-US" dirty="0">
@@ -7393,15 +7337,7 @@
                   <a:srgbClr val="0000FF"/>
                 </a:solidFill>
               </a:rPr>
-              <a:t>ANS</a:t>
-            </a:r>
-            <a:r>
-              <a:rPr lang="en-US" altLang="zh-TW" dirty="0" smtClean="0">
-                <a:solidFill>
-                  <a:srgbClr val="0000FF"/>
-                </a:solidFill>
-              </a:rPr>
-              <a:t>:</a:t>
+              <a:t>ANS:</a:t>
             </a:r>
             <a:endParaRPr lang="zh-TW" altLang="en-US" dirty="0">
               <a:solidFill>
